--- a/05-AI应用基础48课时版/V2授课PPT/W18-第19次课-RAG知识库问答（上）：.pptx
+++ b/05-AI应用基础48课时版/V2授课PPT/W18-第19次课-RAG知识库问答（上）：.pptx
@@ -59614,7 +59614,7 @@
                 </a:solidFill>
                 <a:latin typeface="微软雅黑"/>
               </a:rPr>
-              <a:t>下次课预告（第19周）</a:t>
+              <a:t>下次课预告（第18周）</a:t>
             </a:r>
           </a:p>
         </p:txBody>
